--- a/examples/advanced/rot/oemirot_dualslot_hwcrypto/doc/diagrams/oemirot_architecture.pptx
+++ b/examples/advanced/rot/oemirot_dualslot_hwcrypto/doc/diagrams/oemirot_architecture.pptx
@@ -18,6 +18,8 @@
     <p:sldId id="266" r:id="rId18"/>
     <p:sldId id="267" r:id="rId19"/>
     <p:sldId id="268" r:id="rId20"/>
+    <p:sldId id="269" r:id="rId21"/>
+    <p:sldId id="270" r:id="rId22"/>
   </p:sldIdLst>
   <p:sldSz cx="12191695" cy="6858000" type="screen4x3"/>
   <p:notesSz cx="6858000" cy="9144000"/>
@@ -725,6 +727,146 @@
           <a:p>
             <a:r>
               <a:t>Proposed order for the decision. Questions 5 and 6 are irreversible once devices are provisioned, so they need an answer before anything ships.</a:t>
+            </a:r>
+          </a:p>
+        </p:txBody>
+      </p:sp>
+      <p:sp>
+        <p:nvSpPr>
+          <p:cNvPr id="4" name="Slide Number Placeholder 3"/>
+          <p:cNvSpPr>
+            <a:spLocks noGrp="1"/>
+          </p:cNvSpPr>
+          <p:nvPr>
+            <p:ph type="sldNum" idx="5" sz="quarter"/>
+          </p:nvPr>
+        </p:nvSpPr>
+        <p:spPr/>
+      </p:sp>
+    </p:spTree>
+  </p:cSld>
+  <p:clrMapOvr>
+    <a:masterClrMapping/>
+  </p:clrMapOvr>
+</p:notes>
+</file>
+
+<file path=ppt/notesSlides/notesSlide13.xml><?xml version="1.0" encoding="utf-8"?>
+<p:notes xmlns:a="http://schemas.openxmlformats.org/drawingml/2006/main" xmlns:p="http://schemas.openxmlformats.org/presentationml/2006/main" xmlns:r="http://schemas.openxmlformats.org/officeDocument/2006/relationships">
+  <p:cSld>
+    <p:spTree>
+      <p:nvGrpSpPr>
+        <p:cNvPr id="1" name=""/>
+        <p:cNvGrpSpPr/>
+        <p:nvPr/>
+      </p:nvGrpSpPr>
+      <p:grpSpPr>
+        <a:xfrm>
+          <a:off x="0" y="0"/>
+          <a:ext cx="0" cy="0"/>
+          <a:chOff x="0" y="0"/>
+          <a:chExt cx="0" cy="0"/>
+        </a:xfrm>
+      </p:grpSpPr>
+      <p:sp>
+        <p:nvSpPr>
+          <p:cNvPr id="2" name="Slide Image Placeholder 1"/>
+          <p:cNvSpPr>
+            <a:spLocks noGrp="1"/>
+          </p:cNvSpPr>
+          <p:nvPr>
+            <p:ph type="sldImg" idx="2"/>
+          </p:nvPr>
+        </p:nvSpPr>
+        <p:spPr/>
+      </p:sp>
+      <p:sp>
+        <p:nvSpPr>
+          <p:cNvPr id="3" name="Notes Placeholder 2"/>
+          <p:cNvSpPr>
+            <a:spLocks noGrp="1"/>
+          </p:cNvSpPr>
+          <p:nvPr>
+            <p:ph type="body" idx="3" sz="quarter"/>
+          </p:nvPr>
+        </p:nvSpPr>
+        <p:spPr/>
+        <p:txBody>
+          <a:bodyPr/>
+          <a:lstStyle/>
+          <a:p>
+            <a:r>
+              <a:t>FAQ. The magic trailer is a completion flag, not a trust signal - and the app writes the image encrypted because it has no access to the key. Keep for questions.</a:t>
+            </a:r>
+          </a:p>
+        </p:txBody>
+      </p:sp>
+      <p:sp>
+        <p:nvSpPr>
+          <p:cNvPr id="4" name="Slide Number Placeholder 3"/>
+          <p:cNvSpPr>
+            <a:spLocks noGrp="1"/>
+          </p:cNvSpPr>
+          <p:nvPr>
+            <p:ph type="sldNum" idx="5" sz="quarter"/>
+          </p:nvPr>
+        </p:nvSpPr>
+        <p:spPr/>
+      </p:sp>
+    </p:spTree>
+  </p:cSld>
+  <p:clrMapOvr>
+    <a:masterClrMapping/>
+  </p:clrMapOvr>
+</p:notes>
+</file>
+
+<file path=ppt/notesSlides/notesSlide14.xml><?xml version="1.0" encoding="utf-8"?>
+<p:notes xmlns:a="http://schemas.openxmlformats.org/drawingml/2006/main" xmlns:p="http://schemas.openxmlformats.org/presentationml/2006/main" xmlns:r="http://schemas.openxmlformats.org/officeDocument/2006/relationships">
+  <p:cSld>
+    <p:spTree>
+      <p:nvGrpSpPr>
+        <p:cNvPr id="1" name=""/>
+        <p:cNvGrpSpPr/>
+        <p:nvPr/>
+      </p:nvGrpSpPr>
+      <p:grpSpPr>
+        <a:xfrm>
+          <a:off x="0" y="0"/>
+          <a:ext cx="0" cy="0"/>
+          <a:chOff x="0" y="0"/>
+          <a:chExt cx="0" cy="0"/>
+        </a:xfrm>
+      </p:grpSpPr>
+      <p:sp>
+        <p:nvSpPr>
+          <p:cNvPr id="2" name="Slide Image Placeholder 1"/>
+          <p:cNvSpPr>
+            <a:spLocks noGrp="1"/>
+          </p:cNvSpPr>
+          <p:nvPr>
+            <p:ph type="sldImg" idx="2"/>
+          </p:nvPr>
+        </p:nvSpPr>
+        <p:spPr/>
+      </p:sp>
+      <p:sp>
+        <p:nvSpPr>
+          <p:cNvPr id="3" name="Notes Placeholder 2"/>
+          <p:cNvSpPr>
+            <a:spLocks noGrp="1"/>
+          </p:cNvSpPr>
+          <p:nvPr>
+            <p:ph type="body" idx="3" sz="quarter"/>
+          </p:nvPr>
+        </p:nvSpPr>
+        <p:spPr/>
+        <p:txBody>
+          <a:bodyPr/>
+          <a:lstStyle/>
+          <a:p>
+            <a:r>
+              <a:t>FAQ. Calibration data must sit outside the slots; mirroring inside them does not work. Note the cost: reserving N bytes removes N from each slot.</a:t>
             </a:r>
           </a:p>
         </p:txBody>
@@ -4537,6 +4679,90 @@
       <p:pic>
         <p:nvPicPr>
           <p:cNvPr id="2" name="Picture 1" descr="12-decision-tree.png"/>
+          <p:cNvPicPr>
+            <a:picLocks noChangeAspect="1"/>
+          </p:cNvPicPr>
+          <p:nvPr/>
+        </p:nvPicPr>
+        <p:blipFill>
+          <a:blip r:embed="rId2"/>
+          <a:stretch>
+            <a:fillRect/>
+          </a:stretch>
+        </p:blipFill>
+        <p:spPr>
+          <a:xfrm>
+            <a:off x="0" y="0"/>
+            <a:ext cx="12191695" cy="6858000"/>
+          </a:xfrm>
+          <a:prstGeom prst="rect">
+            <a:avLst/>
+          </a:prstGeom>
+        </p:spPr>
+      </p:pic>
+    </p:spTree>
+  </p:cSld>
+  <p:clrMapOvr>
+    <a:masterClrMapping/>
+  </p:clrMapOvr>
+</p:sld>
+</file>
+
+<file path=ppt/slides/slide14.xml><?xml version="1.0" encoding="utf-8"?>
+<p:sld xmlns:a="http://schemas.openxmlformats.org/drawingml/2006/main" xmlns:p="http://schemas.openxmlformats.org/presentationml/2006/main" xmlns:r="http://schemas.openxmlformats.org/officeDocument/2006/relationships">
+  <p:cSld>
+    <p:spTree>
+      <p:nvGrpSpPr>
+        <p:cNvPr id="1" name=""/>
+        <p:cNvGrpSpPr/>
+        <p:nvPr/>
+      </p:nvGrpSpPr>
+      <p:grpSpPr/>
+      <p:pic>
+        <p:nvPicPr>
+          <p:cNvPr id="2" name="Picture 1" descr="13-faq-images.png"/>
+          <p:cNvPicPr>
+            <a:picLocks noChangeAspect="1"/>
+          </p:cNvPicPr>
+          <p:nvPr/>
+        </p:nvPicPr>
+        <p:blipFill>
+          <a:blip r:embed="rId2"/>
+          <a:stretch>
+            <a:fillRect/>
+          </a:stretch>
+        </p:blipFill>
+        <p:spPr>
+          <a:xfrm>
+            <a:off x="0" y="0"/>
+            <a:ext cx="12191695" cy="6858000"/>
+          </a:xfrm>
+          <a:prstGeom prst="rect">
+            <a:avLst/>
+          </a:prstGeom>
+        </p:spPr>
+      </p:pic>
+    </p:spTree>
+  </p:cSld>
+  <p:clrMapOvr>
+    <a:masterClrMapping/>
+  </p:clrMapOvr>
+</p:sld>
+</file>
+
+<file path=ppt/slides/slide15.xml><?xml version="1.0" encoding="utf-8"?>
+<p:sld xmlns:a="http://schemas.openxmlformats.org/drawingml/2006/main" xmlns:p="http://schemas.openxmlformats.org/presentationml/2006/main" xmlns:r="http://schemas.openxmlformats.org/officeDocument/2006/relationships">
+  <p:cSld>
+    <p:spTree>
+      <p:nvGrpSpPr>
+        <p:cNvPr id="1" name=""/>
+        <p:cNvGrpSpPr/>
+        <p:nvPr/>
+      </p:nvGrpSpPr>
+      <p:grpSpPr/>
+      <p:pic>
+        <p:nvPicPr>
+          <p:cNvPr id="2" name="Picture 1" descr="14-faq-data.png"/>
           <p:cNvPicPr>
             <a:picLocks noChangeAspect="1"/>
           </p:cNvPicPr>

--- a/examples/advanced/rot/oemirot_dualslot_hwcrypto/doc/diagrams/oemirot_architecture.pptx
+++ b/examples/advanced/rot/oemirot_dualslot_hwcrypto/doc/diagrams/oemirot_architecture.pptx
@@ -20,6 +20,8 @@
     <p:sldId id="268" r:id="rId20"/>
     <p:sldId id="269" r:id="rId21"/>
     <p:sldId id="270" r:id="rId22"/>
+    <p:sldId id="271" r:id="rId23"/>
+    <p:sldId id="272" r:id="rId24"/>
   </p:sldIdLst>
   <p:sldSz cx="12191695" cy="6858000" type="screen4x3"/>
   <p:notesSz cx="6858000" cy="9144000"/>
@@ -867,6 +869,146 @@
           <a:p>
             <a:r>
               <a:t>FAQ. Calibration data must sit outside the slots; mirroring inside them does not work. Note the cost: reserving N bytes removes N from each slot.</a:t>
+            </a:r>
+          </a:p>
+        </p:txBody>
+      </p:sp>
+      <p:sp>
+        <p:nvSpPr>
+          <p:cNvPr id="4" name="Slide Number Placeholder 3"/>
+          <p:cNvSpPr>
+            <a:spLocks noGrp="1"/>
+          </p:cNvSpPr>
+          <p:nvPr>
+            <p:ph type="sldNum" idx="5" sz="quarter"/>
+          </p:nvPr>
+        </p:nvSpPr>
+        <p:spPr/>
+      </p:sp>
+    </p:spTree>
+  </p:cSld>
+  <p:clrMapOvr>
+    <a:masterClrMapping/>
+  </p:clrMapOvr>
+</p:notes>
+</file>
+
+<file path=ppt/notesSlides/notesSlide15.xml><?xml version="1.0" encoding="utf-8"?>
+<p:notes xmlns:a="http://schemas.openxmlformats.org/drawingml/2006/main" xmlns:p="http://schemas.openxmlformats.org/presentationml/2006/main" xmlns:r="http://schemas.openxmlformats.org/officeDocument/2006/relationships">
+  <p:cSld>
+    <p:spTree>
+      <p:nvGrpSpPr>
+        <p:cNvPr id="1" name=""/>
+        <p:cNvGrpSpPr/>
+        <p:nvPr/>
+      </p:nvGrpSpPr>
+      <p:grpSpPr>
+        <a:xfrm>
+          <a:off x="0" y="0"/>
+          <a:ext cx="0" cy="0"/>
+          <a:chOff x="0" y="0"/>
+          <a:chExt cx="0" cy="0"/>
+        </a:xfrm>
+      </p:grpSpPr>
+      <p:sp>
+        <p:nvSpPr>
+          <p:cNvPr id="2" name="Slide Image Placeholder 1"/>
+          <p:cNvSpPr>
+            <a:spLocks noGrp="1"/>
+          </p:cNvSpPr>
+          <p:nvPr>
+            <p:ph type="sldImg" idx="2"/>
+          </p:nvPr>
+        </p:nvSpPr>
+        <p:spPr/>
+      </p:sp>
+      <p:sp>
+        <p:nvSpPr>
+          <p:cNvPr id="3" name="Notes Placeholder 2"/>
+          <p:cNvSpPr>
+            <a:spLocks noGrp="1"/>
+          </p:cNvSpPr>
+          <p:nvPr>
+            <p:ph type="body" idx="3" sz="quarter"/>
+          </p:nvPr>
+        </p:nvSpPr>
+        <p:spPr/>
+        <p:txBody>
+          <a:bodyPr/>
+          <a:lstStyle/>
+          <a:p>
+            <a:r>
+              <a:t>FAQ. Two corrections worth stressing: swap needs ONE bootloader and no mirroring, and encryption costs the running application nothing.</a:t>
+            </a:r>
+          </a:p>
+        </p:txBody>
+      </p:sp>
+      <p:sp>
+        <p:nvSpPr>
+          <p:cNvPr id="4" name="Slide Number Placeholder 3"/>
+          <p:cNvSpPr>
+            <a:spLocks noGrp="1"/>
+          </p:cNvSpPr>
+          <p:nvPr>
+            <p:ph type="sldNum" idx="5" sz="quarter"/>
+          </p:nvPr>
+        </p:nvSpPr>
+        <p:spPr/>
+      </p:sp>
+    </p:spTree>
+  </p:cSld>
+  <p:clrMapOvr>
+    <a:masterClrMapping/>
+  </p:clrMapOvr>
+</p:notes>
+</file>
+
+<file path=ppt/notesSlides/notesSlide16.xml><?xml version="1.0" encoding="utf-8"?>
+<p:notes xmlns:a="http://schemas.openxmlformats.org/drawingml/2006/main" xmlns:p="http://schemas.openxmlformats.org/presentationml/2006/main" xmlns:r="http://schemas.openxmlformats.org/officeDocument/2006/relationships">
+  <p:cSld>
+    <p:spTree>
+      <p:nvGrpSpPr>
+        <p:cNvPr id="1" name=""/>
+        <p:cNvGrpSpPr/>
+        <p:nvPr/>
+      </p:nvGrpSpPr>
+      <p:grpSpPr>
+        <a:xfrm>
+          <a:off x="0" y="0"/>
+          <a:ext cx="0" cy="0"/>
+          <a:chOff x="0" y="0"/>
+          <a:chExt cx="0" cy="0"/>
+        </a:xfrm>
+      </p:grpSpPr>
+      <p:sp>
+        <p:nvSpPr>
+          <p:cNvPr id="2" name="Slide Image Placeholder 1"/>
+          <p:cNvSpPr>
+            <a:spLocks noGrp="1"/>
+          </p:cNvSpPr>
+          <p:nvPr>
+            <p:ph type="sldImg" idx="2"/>
+          </p:nvPr>
+        </p:nvSpPr>
+        <p:spPr/>
+      </p:sp>
+      <p:sp>
+        <p:nvSpPr>
+          <p:cNvPr id="3" name="Notes Placeholder 2"/>
+          <p:cNvSpPr>
+            <a:spLocks noGrp="1"/>
+          </p:cNvSpPr>
+          <p:nvPr>
+            <p:ph type="body" idx="3" sz="quarter"/>
+          </p:nvPr>
+        </p:nvSpPr>
+        <p:spPr/>
+        <p:txBody>
+          <a:bodyPr/>
+          <a:lstStyle/>
+          <a:p>
+            <a:r>
+              <a:t>Closing slide. Do not try to answer these here - the goal is to leave with an owner and a date against each. The key strategy and the lock-down level are the two that cannot be revisited after provisioning.</a:t>
             </a:r>
           </a:p>
         </p:txBody>
@@ -4763,6 +4905,90 @@
       <p:pic>
         <p:nvPicPr>
           <p:cNvPr id="2" name="Picture 1" descr="14-faq-data.png"/>
+          <p:cNvPicPr>
+            <a:picLocks noChangeAspect="1"/>
+          </p:cNvPicPr>
+          <p:nvPr/>
+        </p:nvPicPr>
+        <p:blipFill>
+          <a:blip r:embed="rId2"/>
+          <a:stretch>
+            <a:fillRect/>
+          </a:stretch>
+        </p:blipFill>
+        <p:spPr>
+          <a:xfrm>
+            <a:off x="0" y="0"/>
+            <a:ext cx="12191695" cy="6858000"/>
+          </a:xfrm>
+          <a:prstGeom prst="rect">
+            <a:avLst/>
+          </a:prstGeom>
+        </p:spPr>
+      </p:pic>
+    </p:spTree>
+  </p:cSld>
+  <p:clrMapOvr>
+    <a:masterClrMapping/>
+  </p:clrMapOvr>
+</p:sld>
+</file>
+
+<file path=ppt/slides/slide16.xml><?xml version="1.0" encoding="utf-8"?>
+<p:sld xmlns:a="http://schemas.openxmlformats.org/drawingml/2006/main" xmlns:p="http://schemas.openxmlformats.org/presentationml/2006/main" xmlns:r="http://schemas.openxmlformats.org/officeDocument/2006/relationships">
+  <p:cSld>
+    <p:spTree>
+      <p:nvGrpSpPr>
+        <p:cNvPr id="1" name=""/>
+        <p:cNvGrpSpPr/>
+        <p:nvPr/>
+      </p:nvGrpSpPr>
+      <p:grpSpPr/>
+      <p:pic>
+        <p:nvPicPr>
+          <p:cNvPr id="2" name="Picture 1" descr="15-faq-swap-and-speed.png"/>
+          <p:cNvPicPr>
+            <a:picLocks noChangeAspect="1"/>
+          </p:cNvPicPr>
+          <p:nvPr/>
+        </p:nvPicPr>
+        <p:blipFill>
+          <a:blip r:embed="rId2"/>
+          <a:stretch>
+            <a:fillRect/>
+          </a:stretch>
+        </p:blipFill>
+        <p:spPr>
+          <a:xfrm>
+            <a:off x="0" y="0"/>
+            <a:ext cx="12191695" cy="6858000"/>
+          </a:xfrm>
+          <a:prstGeom prst="rect">
+            <a:avLst/>
+          </a:prstGeom>
+        </p:spPr>
+      </p:pic>
+    </p:spTree>
+  </p:cSld>
+  <p:clrMapOvr>
+    <a:masterClrMapping/>
+  </p:clrMapOvr>
+</p:sld>
+</file>
+
+<file path=ppt/slides/slide17.xml><?xml version="1.0" encoding="utf-8"?>
+<p:sld xmlns:a="http://schemas.openxmlformats.org/drawingml/2006/main" xmlns:p="http://schemas.openxmlformats.org/presentationml/2006/main" xmlns:r="http://schemas.openxmlformats.org/officeDocument/2006/relationships">
+  <p:cSld>
+    <p:spTree>
+      <p:nvGrpSpPr>
+        <p:cNvPr id="1" name=""/>
+        <p:cNvGrpSpPr/>
+        <p:nvPr/>
+      </p:nvGrpSpPr>
+      <p:grpSpPr/>
+      <p:pic>
+        <p:nvPicPr>
+          <p:cNvPr id="2" name="Picture 1" descr="16-open-questions.png"/>
           <p:cNvPicPr>
             <a:picLocks noChangeAspect="1"/>
           </p:cNvPicPr>

--- a/examples/advanced/rot/oemirot_dualslot_hwcrypto/doc/diagrams/oemirot_architecture.pptx
+++ b/examples/advanced/rot/oemirot_dualslot_hwcrypto/doc/diagrams/oemirot_architecture.pptx
@@ -22,6 +22,8 @@
     <p:sldId id="270" r:id="rId22"/>
     <p:sldId id="271" r:id="rId23"/>
     <p:sldId id="272" r:id="rId24"/>
+    <p:sldId id="273" r:id="rId25"/>
+    <p:sldId id="274" r:id="rId26"/>
   </p:sldIdLst>
   <p:sldSz cx="12191695" cy="6858000" type="screen4x3"/>
   <p:notesSz cx="6858000" cy="9144000"/>
@@ -518,7 +520,7 @@
           <a:lstStyle/>
           <a:p>
             <a:r>
-              <a:t>The frame for everything else: an immutable first stage that checks the second one, then hides itself. Nothing the application does can reach back into it.</a:t>
+              <a:t>Vocabulary slide. Do not read it out - put it up, say it stays available, and come back to it whenever someone asks what a term means.</a:t>
             </a:r>
           </a:p>
         </p:txBody>
@@ -588,7 +590,7 @@
           <a:lstStyle/>
           <a:p>
             <a:r>
-              <a:t>Detail view of the same trade-offs. The status row separates what we have from what we would have to build.</a:t>
+              <a:t>Attractive on paper - instant install. Be honest about the open question: SWAP_BANK moves the bootloader too, and nothing in our repo implements this yet.</a:t>
             </a:r>
           </a:p>
         </p:txBody>
@@ -658,7 +660,7 @@
           <a:lstStyle/>
           <a:p>
             <a:r>
-              <a:t>The argument in one table. Four failures are handled identically - only the last row separates overwrite from swap.</a:t>
+              <a:t>The four arrangements side by side. The closing question is the one that actually picks a column; everything else follows from it.</a:t>
             </a:r>
           </a:p>
         </p:txBody>
@@ -728,7 +730,7 @@
           <a:lstStyle/>
           <a:p>
             <a:r>
-              <a:t>Proposed order for the decision. Questions 5 and 6 are irreversible once devices are provisioned, so they need an answer before anything ships.</a:t>
+              <a:t>Detail view of the same trade-offs. The status row separates what we have from what we would have to build.</a:t>
             </a:r>
           </a:p>
         </p:txBody>
@@ -798,7 +800,7 @@
           <a:lstStyle/>
           <a:p>
             <a:r>
-              <a:t>FAQ. The magic trailer is a completion flag, not a trust signal - and the app writes the image encrypted because it has no access to the key. Keep for questions.</a:t>
+              <a:t>The argument in one table. Four failures are handled identically - only the last row separates overwrite from swap.</a:t>
             </a:r>
           </a:p>
         </p:txBody>
@@ -868,7 +870,7 @@
           <a:lstStyle/>
           <a:p>
             <a:r>
-              <a:t>FAQ. Calibration data must sit outside the slots; mirroring inside them does not work. Note the cost: reserving N bytes removes N from each slot.</a:t>
+              <a:t>Proposed order for the decision. Questions 5 and 6 are irreversible once devices are provisioned, so they need an answer before anything ships.</a:t>
             </a:r>
           </a:p>
         </p:txBody>
@@ -938,7 +940,7 @@
           <a:lstStyle/>
           <a:p>
             <a:r>
-              <a:t>FAQ. Two corrections worth stressing: swap needs ONE bootloader and no mirroring, and encryption costs the running application nothing.</a:t>
+              <a:t>FAQ. The magic trailer is a completion flag, not a trust signal - and the app writes the image encrypted because it has no access to the key. Keep for questions.</a:t>
             </a:r>
           </a:p>
         </p:txBody>
@@ -1008,6 +1010,146 @@
           <a:lstStyle/>
           <a:p>
             <a:r>
+              <a:t>FAQ. Calibration data must sit outside the slots; mirroring inside them does not work. Note the cost: reserving N bytes removes N from each slot.</a:t>
+            </a:r>
+          </a:p>
+        </p:txBody>
+      </p:sp>
+      <p:sp>
+        <p:nvSpPr>
+          <p:cNvPr id="4" name="Slide Number Placeholder 3"/>
+          <p:cNvSpPr>
+            <a:spLocks noGrp="1"/>
+          </p:cNvSpPr>
+          <p:nvPr>
+            <p:ph type="sldNum" idx="5" sz="quarter"/>
+          </p:nvPr>
+        </p:nvSpPr>
+        <p:spPr/>
+      </p:sp>
+    </p:spTree>
+  </p:cSld>
+  <p:clrMapOvr>
+    <a:masterClrMapping/>
+  </p:clrMapOvr>
+</p:notes>
+</file>
+
+<file path=ppt/notesSlides/notesSlide17.xml><?xml version="1.0" encoding="utf-8"?>
+<p:notes xmlns:a="http://schemas.openxmlformats.org/drawingml/2006/main" xmlns:p="http://schemas.openxmlformats.org/presentationml/2006/main" xmlns:r="http://schemas.openxmlformats.org/officeDocument/2006/relationships">
+  <p:cSld>
+    <p:spTree>
+      <p:nvGrpSpPr>
+        <p:cNvPr id="1" name=""/>
+        <p:cNvGrpSpPr/>
+        <p:nvPr/>
+      </p:nvGrpSpPr>
+      <p:grpSpPr>
+        <a:xfrm>
+          <a:off x="0" y="0"/>
+          <a:ext cx="0" cy="0"/>
+          <a:chOff x="0" y="0"/>
+          <a:chExt cx="0" cy="0"/>
+        </a:xfrm>
+      </p:grpSpPr>
+      <p:sp>
+        <p:nvSpPr>
+          <p:cNvPr id="2" name="Slide Image Placeholder 1"/>
+          <p:cNvSpPr>
+            <a:spLocks noGrp="1"/>
+          </p:cNvSpPr>
+          <p:nvPr>
+            <p:ph type="sldImg" idx="2"/>
+          </p:nvPr>
+        </p:nvSpPr>
+        <p:spPr/>
+      </p:sp>
+      <p:sp>
+        <p:nvSpPr>
+          <p:cNvPr id="3" name="Notes Placeholder 2"/>
+          <p:cNvSpPr>
+            <a:spLocks noGrp="1"/>
+          </p:cNvSpPr>
+          <p:nvPr>
+            <p:ph type="body" idx="3" sz="quarter"/>
+          </p:nvPr>
+        </p:nvSpPr>
+        <p:spPr/>
+        <p:txBody>
+          <a:bodyPr/>
+          <a:lstStyle/>
+          <a:p>
+            <a:r>
+              <a:t>FAQ. Two corrections worth stressing: swap needs ONE bootloader and no mirroring, and encryption costs the running application nothing.</a:t>
+            </a:r>
+          </a:p>
+        </p:txBody>
+      </p:sp>
+      <p:sp>
+        <p:nvSpPr>
+          <p:cNvPr id="4" name="Slide Number Placeholder 3"/>
+          <p:cNvSpPr>
+            <a:spLocks noGrp="1"/>
+          </p:cNvSpPr>
+          <p:nvPr>
+            <p:ph type="sldNum" idx="5" sz="quarter"/>
+          </p:nvPr>
+        </p:nvSpPr>
+        <p:spPr/>
+      </p:sp>
+    </p:spTree>
+  </p:cSld>
+  <p:clrMapOvr>
+    <a:masterClrMapping/>
+  </p:clrMapOvr>
+</p:notes>
+</file>
+
+<file path=ppt/notesSlides/notesSlide18.xml><?xml version="1.0" encoding="utf-8"?>
+<p:notes xmlns:a="http://schemas.openxmlformats.org/drawingml/2006/main" xmlns:p="http://schemas.openxmlformats.org/presentationml/2006/main" xmlns:r="http://schemas.openxmlformats.org/officeDocument/2006/relationships">
+  <p:cSld>
+    <p:spTree>
+      <p:nvGrpSpPr>
+        <p:cNvPr id="1" name=""/>
+        <p:cNvGrpSpPr/>
+        <p:nvPr/>
+      </p:nvGrpSpPr>
+      <p:grpSpPr>
+        <a:xfrm>
+          <a:off x="0" y="0"/>
+          <a:ext cx="0" cy="0"/>
+          <a:chOff x="0" y="0"/>
+          <a:chExt cx="0" cy="0"/>
+        </a:xfrm>
+      </p:grpSpPr>
+      <p:sp>
+        <p:nvSpPr>
+          <p:cNvPr id="2" name="Slide Image Placeholder 1"/>
+          <p:cNvSpPr>
+            <a:spLocks noGrp="1"/>
+          </p:cNvSpPr>
+          <p:nvPr>
+            <p:ph type="sldImg" idx="2"/>
+          </p:nvPr>
+        </p:nvSpPr>
+        <p:spPr/>
+      </p:sp>
+      <p:sp>
+        <p:nvSpPr>
+          <p:cNvPr id="3" name="Notes Placeholder 2"/>
+          <p:cNvSpPr>
+            <a:spLocks noGrp="1"/>
+          </p:cNvSpPr>
+          <p:nvPr>
+            <p:ph type="body" idx="3" sz="quarter"/>
+          </p:nvPr>
+        </p:nvSpPr>
+        <p:spPr/>
+        <p:txBody>
+          <a:bodyPr/>
+          <a:lstStyle/>
+          <a:p>
+            <a:r>
               <a:t>Closing slide. Do not try to answer these here - the goal is to leave with an owner and a date against each. The key strategy and the lock-down level are the two that cannot be revisited after provisioning.</a:t>
             </a:r>
           </a:p>
@@ -1078,7 +1220,7 @@
           <a:lstStyle/>
           <a:p>
             <a:r>
-              <a:t>Signing and encryption answer different questions. Note the two weak points we own: a single key pair with no revocation path, and a decryption key sitting raw in flash.</a:t>
+              <a:t>The frame for everything else: an immutable first stage that checks the second one, then hides itself. Nothing the application does can reach back into it.</a:t>
             </a:r>
           </a:p>
         </p:txBody>
@@ -1148,7 +1290,7 @@
           <a:lstStyle/>
           <a:p>
             <a:r>
-              <a:t>Real offsets from flash_layout.h. The headline number is 464 KB usable out of 1 MB - that is the price of the second slot, and it drives most of the later decisions.</a:t>
+              <a:t>Signing and encryption answer different questions. Note the two weak points we own: a single key pair with no revocation path, and a decryption key sitting raw in flash.</a:t>
             </a:r>
           </a:p>
         </p:txBody>
@@ -1218,7 +1360,7 @@
           <a:lstStyle/>
           <a:p>
             <a:r>
-              <a:t>Key point: the bootloader never downloads anything. All transport code lives in the replaceable application, so the immutable part stays small and offline.</a:t>
+              <a:t>Real offsets from flash_layout.h. The headline number is 464 KB usable out of 1 MB - that is the price of the second slot, and it drives most of the later decisions.</a:t>
             </a:r>
           </a:p>
         </p:txBody>
@@ -1288,7 +1430,7 @@
           <a:lstStyle/>
           <a:p>
             <a:r>
-              <a:t>This runs on every reset, not just on update. Three independent rejection paths, and the primary slot is re-verified even when no update is pending.</a:t>
+              <a:t>Key point: the bootloader never downloads anything. All transport code lives in the replaceable application, so the immutable part stays small and offline.</a:t>
             </a:r>
           </a:p>
         </p:txBody>
@@ -1358,7 +1500,7 @@
           <a:lstStyle/>
           <a:p>
             <a:r>
-              <a:t>What the board does today. Walk the five states, then land on the red box: a signed image that crashes takes the update path down with it.</a:t>
+              <a:t>This runs on every reset, not just on update. Three independent rejection paths, and the primary slot is re-verified even when no update is pending.</a:t>
             </a:r>
           </a:p>
         </p:txBody>
@@ -1428,7 +1570,7 @@
           <a:lstStyle/>
           <a:p>
             <a:r>
-              <a:t>The same flow plus one confirmation flag. Worth stressing: the confirm code already exists in our application, compiled out by OVERWRITE_ONLY.</a:t>
+              <a:t>What the board does today. Walk the five states, then land on the red box: a signed image that crashes takes the update path down with it.</a:t>
             </a:r>
           </a:p>
         </p:txBody>
@@ -1498,7 +1640,7 @@
           <a:lstStyle/>
           <a:p>
             <a:r>
-              <a:t>Attractive on paper - instant install. Be honest about the open question: SWAP_BANK moves the bootloader too, and nothing in our repo implements this yet.</a:t>
+              <a:t>Answers the question the previous slide always provokes: why a separate 'request install' step at all. The short version: the two stages cannot talk, so the only channel is a mark in flash - and that mark also proves the download completed.</a:t>
             </a:r>
           </a:p>
         </p:txBody>
@@ -1568,7 +1710,7 @@
           <a:lstStyle/>
           <a:p>
             <a:r>
-              <a:t>The four arrangements side by side. The closing question is the one that actually picks a column; everything else follows from it.</a:t>
+              <a:t>The same flow plus one confirmation flag. Worth stressing: the confirm code already exists in our application, compiled out by OVERWRITE_ONLY.</a:t>
             </a:r>
           </a:p>
         </p:txBody>
@@ -4694,7 +4836,7 @@
       <p:grpSpPr/>
       <p:pic>
         <p:nvPicPr>
-          <p:cNvPr id="2" name="Picture 1" descr="08-architecture-variants.png"/>
+          <p:cNvPr id="2" name="Picture 1" descr="06-swap-sequence.png"/>
           <p:cNvPicPr>
             <a:picLocks noChangeAspect="1"/>
           </p:cNvPicPr>
@@ -4736,7 +4878,7 @@
       <p:grpSpPr/>
       <p:pic>
         <p:nvPicPr>
-          <p:cNvPr id="2" name="Picture 1" descr="09-comparison.png"/>
+          <p:cNvPr id="2" name="Picture 1" descr="07-bank-swap.png"/>
           <p:cNvPicPr>
             <a:picLocks noChangeAspect="1"/>
           </p:cNvPicPr>
@@ -4778,7 +4920,7 @@
       <p:grpSpPr/>
       <p:pic>
         <p:nvPicPr>
-          <p:cNvPr id="2" name="Picture 1" descr="10-failure-modes.png"/>
+          <p:cNvPr id="2" name="Picture 1" descr="08-architecture-variants.png"/>
           <p:cNvPicPr>
             <a:picLocks noChangeAspect="1"/>
           </p:cNvPicPr>
@@ -4820,7 +4962,7 @@
       <p:grpSpPr/>
       <p:pic>
         <p:nvPicPr>
-          <p:cNvPr id="2" name="Picture 1" descr="12-decision-tree.png"/>
+          <p:cNvPr id="2" name="Picture 1" descr="09-comparison.png"/>
           <p:cNvPicPr>
             <a:picLocks noChangeAspect="1"/>
           </p:cNvPicPr>
@@ -4862,7 +5004,7 @@
       <p:grpSpPr/>
       <p:pic>
         <p:nvPicPr>
-          <p:cNvPr id="2" name="Picture 1" descr="13-faq-images.png"/>
+          <p:cNvPr id="2" name="Picture 1" descr="10-failure-modes.png"/>
           <p:cNvPicPr>
             <a:picLocks noChangeAspect="1"/>
           </p:cNvPicPr>
@@ -4904,7 +5046,7 @@
       <p:grpSpPr/>
       <p:pic>
         <p:nvPicPr>
-          <p:cNvPr id="2" name="Picture 1" descr="14-faq-data.png"/>
+          <p:cNvPr id="2" name="Picture 1" descr="12-decision-tree.png"/>
           <p:cNvPicPr>
             <a:picLocks noChangeAspect="1"/>
           </p:cNvPicPr>
@@ -4946,6 +5088,90 @@
       <p:grpSpPr/>
       <p:pic>
         <p:nvPicPr>
+          <p:cNvPr id="2" name="Picture 1" descr="13-faq-images.png"/>
+          <p:cNvPicPr>
+            <a:picLocks noChangeAspect="1"/>
+          </p:cNvPicPr>
+          <p:nvPr/>
+        </p:nvPicPr>
+        <p:blipFill>
+          <a:blip r:embed="rId2"/>
+          <a:stretch>
+            <a:fillRect/>
+          </a:stretch>
+        </p:blipFill>
+        <p:spPr>
+          <a:xfrm>
+            <a:off x="0" y="0"/>
+            <a:ext cx="12191695" cy="6858000"/>
+          </a:xfrm>
+          <a:prstGeom prst="rect">
+            <a:avLst/>
+          </a:prstGeom>
+        </p:spPr>
+      </p:pic>
+    </p:spTree>
+  </p:cSld>
+  <p:clrMapOvr>
+    <a:masterClrMapping/>
+  </p:clrMapOvr>
+</p:sld>
+</file>
+
+<file path=ppt/slides/slide17.xml><?xml version="1.0" encoding="utf-8"?>
+<p:sld xmlns:a="http://schemas.openxmlformats.org/drawingml/2006/main" xmlns:p="http://schemas.openxmlformats.org/presentationml/2006/main" xmlns:r="http://schemas.openxmlformats.org/officeDocument/2006/relationships">
+  <p:cSld>
+    <p:spTree>
+      <p:nvGrpSpPr>
+        <p:cNvPr id="1" name=""/>
+        <p:cNvGrpSpPr/>
+        <p:nvPr/>
+      </p:nvGrpSpPr>
+      <p:grpSpPr/>
+      <p:pic>
+        <p:nvPicPr>
+          <p:cNvPr id="2" name="Picture 1" descr="14-faq-data.png"/>
+          <p:cNvPicPr>
+            <a:picLocks noChangeAspect="1"/>
+          </p:cNvPicPr>
+          <p:nvPr/>
+        </p:nvPicPr>
+        <p:blipFill>
+          <a:blip r:embed="rId2"/>
+          <a:stretch>
+            <a:fillRect/>
+          </a:stretch>
+        </p:blipFill>
+        <p:spPr>
+          <a:xfrm>
+            <a:off x="0" y="0"/>
+            <a:ext cx="12191695" cy="6858000"/>
+          </a:xfrm>
+          <a:prstGeom prst="rect">
+            <a:avLst/>
+          </a:prstGeom>
+        </p:spPr>
+      </p:pic>
+    </p:spTree>
+  </p:cSld>
+  <p:clrMapOvr>
+    <a:masterClrMapping/>
+  </p:clrMapOvr>
+</p:sld>
+</file>
+
+<file path=ppt/slides/slide18.xml><?xml version="1.0" encoding="utf-8"?>
+<p:sld xmlns:a="http://schemas.openxmlformats.org/drawingml/2006/main" xmlns:p="http://schemas.openxmlformats.org/presentationml/2006/main" xmlns:r="http://schemas.openxmlformats.org/officeDocument/2006/relationships">
+  <p:cSld>
+    <p:spTree>
+      <p:nvGrpSpPr>
+        <p:cNvPr id="1" name=""/>
+        <p:cNvGrpSpPr/>
+        <p:nvPr/>
+      </p:nvGrpSpPr>
+      <p:grpSpPr/>
+      <p:pic>
+        <p:nvPicPr>
           <p:cNvPr id="2" name="Picture 1" descr="15-faq-swap-and-speed.png"/>
           <p:cNvPicPr>
             <a:picLocks noChangeAspect="1"/>
@@ -4976,7 +5202,7 @@
 </p:sld>
 </file>
 
-<file path=ppt/slides/slide17.xml><?xml version="1.0" encoding="utf-8"?>
+<file path=ppt/slides/slide19.xml><?xml version="1.0" encoding="utf-8"?>
 <p:sld xmlns:a="http://schemas.openxmlformats.org/drawingml/2006/main" xmlns:p="http://schemas.openxmlformats.org/presentationml/2006/main" xmlns:r="http://schemas.openxmlformats.org/officeDocument/2006/relationships">
   <p:cSld>
     <p:spTree>
@@ -5030,7 +5256,7 @@
       <p:grpSpPr/>
       <p:pic>
         <p:nvPicPr>
-          <p:cNvPr id="2" name="Picture 1" descr="01-two-stage-boot.png"/>
+          <p:cNvPr id="2" name="Picture 1" descr="00-glossary.png"/>
           <p:cNvPicPr>
             <a:picLocks noChangeAspect="1"/>
           </p:cNvPicPr>
@@ -5072,7 +5298,7 @@
       <p:grpSpPr/>
       <p:pic>
         <p:nvPicPr>
-          <p:cNvPr id="2" name="Picture 1" descr="11-trust-model.png"/>
+          <p:cNvPr id="2" name="Picture 1" descr="01-two-stage-boot.png"/>
           <p:cNvPicPr>
             <a:picLocks noChangeAspect="1"/>
           </p:cNvPicPr>
@@ -5114,7 +5340,7 @@
       <p:grpSpPr/>
       <p:pic>
         <p:nvPicPr>
-          <p:cNvPr id="2" name="Picture 1" descr="02-flash-map.png"/>
+          <p:cNvPr id="2" name="Picture 1" descr="11-trust-model.png"/>
           <p:cNvPicPr>
             <a:picLocks noChangeAspect="1"/>
           </p:cNvPicPr>
@@ -5156,7 +5382,7 @@
       <p:grpSpPr/>
       <p:pic>
         <p:nvPicPr>
-          <p:cNvPr id="2" name="Picture 1" descr="03-update-pipeline.png"/>
+          <p:cNvPr id="2" name="Picture 1" descr="02-flash-map.png"/>
           <p:cNvPicPr>
             <a:picLocks noChangeAspect="1"/>
           </p:cNvPicPr>
@@ -5198,7 +5424,7 @@
       <p:grpSpPr/>
       <p:pic>
         <p:nvPicPr>
-          <p:cNvPr id="2" name="Picture 1" descr="04-boot-decision.png"/>
+          <p:cNvPr id="2" name="Picture 1" descr="03-update-pipeline.png"/>
           <p:cNvPicPr>
             <a:picLocks noChangeAspect="1"/>
           </p:cNvPicPr>
@@ -5240,7 +5466,7 @@
       <p:grpSpPr/>
       <p:pic>
         <p:nvPicPr>
-          <p:cNvPr id="2" name="Picture 1" descr="05-overwrite-sequence.png"/>
+          <p:cNvPr id="2" name="Picture 1" descr="04-boot-decision.png"/>
           <p:cNvPicPr>
             <a:picLocks noChangeAspect="1"/>
           </p:cNvPicPr>
@@ -5282,7 +5508,7 @@
       <p:grpSpPr/>
       <p:pic>
         <p:nvPicPr>
-          <p:cNvPr id="2" name="Picture 1" descr="06-swap-sequence.png"/>
+          <p:cNvPr id="2" name="Picture 1" descr="05-overwrite-sequence.png"/>
           <p:cNvPicPr>
             <a:picLocks noChangeAspect="1"/>
           </p:cNvPicPr>
@@ -5324,7 +5550,7 @@
       <p:grpSpPr/>
       <p:pic>
         <p:nvPicPr>
-          <p:cNvPr id="2" name="Picture 1" descr="07-bank-swap.png"/>
+          <p:cNvPr id="2" name="Picture 1" descr="05b-why-install-request.png"/>
           <p:cNvPicPr>
             <a:picLocks noChangeAspect="1"/>
           </p:cNvPicPr>

--- a/examples/advanced/rot/oemirot_dualslot_hwcrypto/doc/diagrams/oemirot_architecture.pptx
+++ b/examples/advanced/rot/oemirot_dualslot_hwcrypto/doc/diagrams/oemirot_architecture.pptx
@@ -43907,6 +43907,334 @@
         </p:nvSpPr>
         <p:spPr>
           <a:xfrm>
+            <a:off x="8077200" y="4602480"/>
+            <a:ext cx="3627120" cy="1584960"/>
+          </a:xfrm>
+          <a:prstGeom prst="roundRect">
+            <a:avLst>
+              <a:gd name="adj" fmla="val 7692"/>
+            </a:avLst>
+          </a:prstGeom>
+          <a:solidFill>
+            <a:srgbClr val="FBE7E8"/>
+          </a:solidFill>
+          <a:ln w="18288">
+            <a:solidFill>
+              <a:srgbClr val="D0323C"/>
+            </a:solidFill>
+          </a:ln>
+          <a:effectLst/>
+        </p:spPr>
+        <p:style>
+          <a:lnRef idx="1">
+            <a:schemeClr val="accent1"/>
+          </a:lnRef>
+          <a:fillRef idx="3">
+            <a:schemeClr val="accent1"/>
+          </a:fillRef>
+          <a:effectRef idx="2">
+            <a:schemeClr val="accent1"/>
+          </a:effectRef>
+          <a:fontRef idx="minor">
+            <a:schemeClr val="lt1"/>
+          </a:fontRef>
+        </p:style>
+        <p:txBody>
+          <a:bodyPr rtlCol="0" anchor="ctr" wrap="none"/>
+          <a:lstStyle/>
+          <a:p>
+            <a:pPr algn="ctr"/>
+          </a:p>
+        </p:txBody>
+      </p:sp>
+      <p:sp>
+        <p:nvSpPr>
+          <p:cNvPr id="51" name="TextBox 50"/>
+          <p:cNvSpPr txBox="1"/>
+          <p:nvPr/>
+        </p:nvSpPr>
+        <p:spPr>
+          <a:xfrm>
+            <a:off x="8392973" y="4721657"/>
+            <a:ext cx="2995574" cy="240030"/>
+          </a:xfrm>
+          <a:prstGeom prst="rect">
+            <a:avLst/>
+          </a:prstGeom>
+          <a:noFill/>
+        </p:spPr>
+        <p:txBody>
+          <a:bodyPr wrap="square" lIns="0" rIns="0" tIns="0" bIns="0">
+            <a:noAutofit/>
+          </a:bodyPr>
+          <a:lstStyle/>
+          <a:p>
+            <a:pPr algn="ctr"/>
+            <a:r>
+              <a:rPr sz="1080" b="1">
+                <a:solidFill>
+                  <a:srgbClr val="D0323C"/>
+                </a:solidFill>
+                <a:latin typeface="Segoe UI"/>
+              </a:rPr>
+              <a:t>Why the primary slot crosses</a:t>
+            </a:r>
+          </a:p>
+        </p:txBody>
+      </p:sp>
+      <p:sp>
+        <p:nvSpPr>
+          <p:cNvPr id="52" name="TextBox 51"/>
+          <p:cNvSpPr txBox="1"/>
+          <p:nvPr/>
+        </p:nvSpPr>
+        <p:spPr>
+          <a:xfrm>
+            <a:off x="9195359" y="4889297"/>
+            <a:ext cx="1390802" cy="240030"/>
+          </a:xfrm>
+          <a:prstGeom prst="rect">
+            <a:avLst/>
+          </a:prstGeom>
+          <a:noFill/>
+        </p:spPr>
+        <p:txBody>
+          <a:bodyPr wrap="square" lIns="0" rIns="0" tIns="0" bIns="0">
+            <a:noAutofit/>
+          </a:bodyPr>
+          <a:lstStyle/>
+          <a:p>
+            <a:pPr algn="ctr"/>
+            <a:r>
+              <a:rPr sz="1080" b="1">
+                <a:solidFill>
+                  <a:srgbClr val="D0323C"/>
+                </a:solidFill>
+                <a:latin typeface="Segoe UI"/>
+              </a:rPr>
+              <a:t>the bank line</a:t>
+            </a:r>
+          </a:p>
+        </p:txBody>
+      </p:sp>
+      <p:sp>
+        <p:nvSpPr>
+          <p:cNvPr id="53" name="TextBox 52"/>
+          <p:cNvSpPr txBox="1"/>
+          <p:nvPr/>
+        </p:nvSpPr>
+        <p:spPr>
+          <a:xfrm>
+            <a:off x="8260080" y="5156454"/>
+            <a:ext cx="3374136" cy="200025"/>
+          </a:xfrm>
+          <a:prstGeom prst="rect">
+            <a:avLst/>
+          </a:prstGeom>
+          <a:noFill/>
+        </p:spPr>
+        <p:txBody>
+          <a:bodyPr wrap="square" lIns="0" rIns="0" tIns="0" bIns="0">
+            <a:noAutofit/>
+          </a:bodyPr>
+          <a:lstStyle/>
+          <a:p>
+            <a:pPr algn="l"/>
+            <a:r>
+              <a:rPr sz="900" b="0">
+                <a:solidFill>
+                  <a:srgbClr val="5B6B80"/>
+                </a:solidFill>
+                <a:latin typeface="Segoe UI"/>
+              </a:rPr>
+              <a:t>96 KB comes off the front for the RoT, so</a:t>
+            </a:r>
+          </a:p>
+        </p:txBody>
+      </p:sp>
+      <p:sp>
+        <p:nvSpPr>
+          <p:cNvPr id="54" name="TextBox 53"/>
+          <p:cNvSpPr txBox="1"/>
+          <p:nvPr/>
+        </p:nvSpPr>
+        <p:spPr>
+          <a:xfrm>
+            <a:off x="8260080" y="5316474"/>
+            <a:ext cx="3621024" cy="200025"/>
+          </a:xfrm>
+          <a:prstGeom prst="rect">
+            <a:avLst/>
+          </a:prstGeom>
+          <a:noFill/>
+        </p:spPr>
+        <p:txBody>
+          <a:bodyPr wrap="square" lIns="0" rIns="0" tIns="0" bIns="0">
+            <a:noAutofit/>
+          </a:bodyPr>
+          <a:lstStyle/>
+          <a:p>
+            <a:pPr algn="l"/>
+            <a:r>
+              <a:rPr sz="900" b="0">
+                <a:solidFill>
+                  <a:srgbClr val="5B6B80"/>
+                </a:solidFill>
+                <a:latin typeface="Segoe UI"/>
+              </a:rPr>
+              <a:t>splitting the remaining 928 KB in half lands</a:t>
+            </a:r>
+          </a:p>
+        </p:txBody>
+      </p:sp>
+      <p:sp>
+        <p:nvSpPr>
+          <p:cNvPr id="55" name="TextBox 54"/>
+          <p:cNvSpPr txBox="1"/>
+          <p:nvPr/>
+        </p:nvSpPr>
+        <p:spPr>
+          <a:xfrm>
+            <a:off x="8260080" y="5476494"/>
+            <a:ext cx="3374136" cy="200025"/>
+          </a:xfrm>
+          <a:prstGeom prst="rect">
+            <a:avLst/>
+          </a:prstGeom>
+          <a:noFill/>
+        </p:spPr>
+        <p:txBody>
+          <a:bodyPr wrap="square" lIns="0" rIns="0" tIns="0" bIns="0">
+            <a:noAutofit/>
+          </a:bodyPr>
+          <a:lstStyle/>
+          <a:p>
+            <a:pPr algn="l"/>
+            <a:r>
+              <a:rPr sz="900" b="0">
+                <a:solidFill>
+                  <a:srgbClr val="5B6B80"/>
+                </a:solidFill>
+                <a:latin typeface="Segoe UI"/>
+              </a:rPr>
+              <a:t>96 KB past the 0x80000 midpoint. Aligning</a:t>
+            </a:r>
+          </a:p>
+        </p:txBody>
+      </p:sp>
+      <p:sp>
+        <p:nvSpPr>
+          <p:cNvPr id="56" name="TextBox 55"/>
+          <p:cNvSpPr txBox="1"/>
+          <p:nvPr/>
+        </p:nvSpPr>
+        <p:spPr>
+          <a:xfrm>
+            <a:off x="8260080" y="5636514"/>
+            <a:ext cx="3044952" cy="200025"/>
+          </a:xfrm>
+          <a:prstGeom prst="rect">
+            <a:avLst/>
+          </a:prstGeom>
+          <a:noFill/>
+        </p:spPr>
+        <p:txBody>
+          <a:bodyPr wrap="square" lIns="0" rIns="0" tIns="0" bIns="0">
+            <a:noAutofit/>
+          </a:bodyPr>
+          <a:lstStyle/>
+          <a:p>
+            <a:pPr algn="l"/>
+            <a:r>
+              <a:rPr sz="900" b="0">
+                <a:solidFill>
+                  <a:srgbClr val="5B6B80"/>
+                </a:solidFill>
+                <a:latin typeface="Segoe UI"/>
+              </a:rPr>
+              <a:t>to the bank instead would mean 416 KB</a:t>
+            </a:r>
+          </a:p>
+        </p:txBody>
+      </p:sp>
+      <p:sp>
+        <p:nvSpPr>
+          <p:cNvPr id="57" name="TextBox 56"/>
+          <p:cNvSpPr txBox="1"/>
+          <p:nvPr/>
+        </p:nvSpPr>
+        <p:spPr>
+          <a:xfrm>
+            <a:off x="8260080" y="5796534"/>
+            <a:ext cx="2221992" cy="200025"/>
+          </a:xfrm>
+          <a:prstGeom prst="rect">
+            <a:avLst/>
+          </a:prstGeom>
+          <a:noFill/>
+        </p:spPr>
+        <p:txBody>
+          <a:bodyPr wrap="square" lIns="0" rIns="0" tIns="0" bIns="0">
+            <a:noAutofit/>
+          </a:bodyPr>
+          <a:lstStyle/>
+          <a:p>
+            <a:pPr algn="l"/>
+            <a:r>
+              <a:rPr sz="900" b="0">
+                <a:solidFill>
+                  <a:srgbClr val="5B6B80"/>
+                </a:solidFill>
+                <a:latin typeface="Segoe UI"/>
+              </a:rPr>
+              <a:t>slots — 48 KB less in each.</a:t>
+            </a:r>
+          </a:p>
+        </p:txBody>
+      </p:sp>
+      <p:sp>
+        <p:nvSpPr>
+          <p:cNvPr id="58" name="TextBox 57"/>
+          <p:cNvSpPr txBox="1"/>
+          <p:nvPr/>
+        </p:nvSpPr>
+        <p:spPr>
+          <a:xfrm>
+            <a:off x="8260080" y="5994959"/>
+            <a:ext cx="4172407" cy="173355"/>
+          </a:xfrm>
+          <a:prstGeom prst="rect">
+            <a:avLst/>
+          </a:prstGeom>
+          <a:noFill/>
+        </p:spPr>
+        <p:txBody>
+          <a:bodyPr wrap="square" lIns="0" rIns="0" tIns="0" bIns="0">
+            <a:noAutofit/>
+          </a:bodyPr>
+          <a:lstStyle/>
+          <a:p>
+            <a:pPr algn="l"/>
+            <a:r>
+              <a:rPr sz="780" b="1">
+                <a:solidFill>
+                  <a:srgbClr val="D0323C"/>
+                </a:solidFill>
+                <a:latin typeface="Segoe UI"/>
+              </a:rPr>
+              <a:t>Harmless for the install — it bites RWW and bank swap.</a:t>
+            </a:r>
+          </a:p>
+        </p:txBody>
+      </p:sp>
+      <p:sp>
+        <p:nvSpPr>
+          <p:cNvPr id="59" name="Rounded Rectangle 58"/>
+          <p:cNvSpPr/>
+          <p:nvPr/>
+        </p:nvSpPr>
+        <p:spPr>
+          <a:xfrm>
             <a:off x="487680" y="6339840"/>
             <a:ext cx="11216640" cy="15240"/>
           </a:xfrm>
@@ -43947,7 +44275,7 @@
       </p:sp>
       <p:sp>
         <p:nvSpPr>
-          <p:cNvPr id="51" name="TextBox 50"/>
+          <p:cNvPr id="60" name="TextBox 59"/>
           <p:cNvSpPr txBox="1"/>
           <p:nvPr/>
         </p:nvSpPr>

--- a/examples/advanced/rot/oemirot_dualslot_hwcrypto/doc/diagrams/oemirot_architecture.pptx
+++ b/examples/advanced/rot/oemirot_dualslot_hwcrypto/doc/diagrams/oemirot_architecture.pptx
@@ -43145,7 +43145,7 @@
         <p:spPr>
           <a:xfrm>
             <a:off x="1424940" y="3352800"/>
-            <a:ext cx="3360420" cy="0"/>
+            <a:ext cx="1836420" cy="0"/>
           </a:xfrm>
           <a:prstGeom prst="line">
             <a:avLst/>
@@ -43180,7 +43180,7 @@
         </p:nvSpPr>
         <p:spPr>
           <a:xfrm>
-            <a:off x="4876800" y="3258617"/>
+            <a:off x="3352800" y="3258617"/>
             <a:ext cx="3530498" cy="240030"/>
           </a:xfrm>
           <a:prstGeom prst="rect">
@@ -43321,7 +43321,7 @@
         <p:spPr>
           <a:xfrm>
             <a:off x="1600200" y="3794760"/>
-            <a:ext cx="3185160" cy="0"/>
+            <a:ext cx="1661160" cy="0"/>
           </a:xfrm>
           <a:prstGeom prst="line">
             <a:avLst/>
@@ -43356,7 +43356,7 @@
         </p:nvSpPr>
         <p:spPr>
           <a:xfrm>
-            <a:off x="4876800" y="3700577"/>
+            <a:off x="3352800" y="3700577"/>
             <a:ext cx="4386377" cy="240030"/>
           </a:xfrm>
           <a:prstGeom prst="rect">
@@ -43899,15 +43899,88 @@
           </a:p>
         </p:txBody>
       </p:sp>
-      <p:sp>
-        <p:nvSpPr>
-          <p:cNvPr id="50" name="Rounded Rectangle 49"/>
+      <p:cxnSp>
+        <p:nvCxnSpPr>
+          <p:cNvPr id="50" name="Connector 49"/>
+          <p:cNvCxnSpPr/>
+          <p:nvPr/>
+        </p:nvCxnSpPr>
+        <p:spPr>
+          <a:xfrm>
+            <a:off x="6126480" y="2773680"/>
+            <a:ext cx="1341120" cy="1021080"/>
+          </a:xfrm>
+          <a:prstGeom prst="line">
+            <a:avLst/>
+          </a:prstGeom>
+          <a:ln w="16764">
+            <a:solidFill>
+              <a:srgbClr val="D0323C"/>
+            </a:solidFill>
+            <a:prstDash val="dash"/>
+          </a:ln>
+        </p:spPr>
+        <p:style>
+          <a:lnRef idx="2">
+            <a:schemeClr val="accent1"/>
+          </a:lnRef>
+          <a:fillRef idx="0">
+            <a:schemeClr val="accent1"/>
+          </a:fillRef>
+          <a:effectRef idx="1">
+            <a:schemeClr val="accent1"/>
+          </a:effectRef>
+          <a:fontRef idx="minor">
+            <a:schemeClr val="tx1"/>
+          </a:fontRef>
+        </p:style>
+      </p:cxnSp>
+      <p:cxnSp>
+        <p:nvCxnSpPr>
+          <p:cNvPr id="51" name="Connector 50"/>
+          <p:cNvCxnSpPr/>
+          <p:nvPr/>
+        </p:nvCxnSpPr>
+        <p:spPr>
+          <a:xfrm>
+            <a:off x="7467600" y="3794760"/>
+            <a:ext cx="548640" cy="0"/>
+          </a:xfrm>
+          <a:prstGeom prst="line">
+            <a:avLst/>
+          </a:prstGeom>
+          <a:ln w="16764">
+            <a:solidFill>
+              <a:srgbClr val="D0323C"/>
+            </a:solidFill>
+            <a:prstDash val="dash"/>
+            <a:tailEnd type="triangle" w="med" len="med"/>
+          </a:ln>
+        </p:spPr>
+        <p:style>
+          <a:lnRef idx="2">
+            <a:schemeClr val="accent1"/>
+          </a:lnRef>
+          <a:fillRef idx="0">
+            <a:schemeClr val="accent1"/>
+          </a:fillRef>
+          <a:effectRef idx="1">
+            <a:schemeClr val="accent1"/>
+          </a:effectRef>
+          <a:fontRef idx="minor">
+            <a:schemeClr val="tx1"/>
+          </a:fontRef>
+        </p:style>
+      </p:cxnSp>
+      <p:sp>
+        <p:nvSpPr>
+          <p:cNvPr id="52" name="Rounded Rectangle 51"/>
           <p:cNvSpPr/>
           <p:nvPr/>
         </p:nvSpPr>
         <p:spPr>
           <a:xfrm>
-            <a:off x="8077200" y="4602480"/>
+            <a:off x="8077200" y="3230880"/>
             <a:ext cx="3627120" cy="1584960"/>
           </a:xfrm>
           <a:prstGeom prst="roundRect">
@@ -43949,13 +44022,13 @@
       </p:sp>
       <p:sp>
         <p:nvSpPr>
-          <p:cNvPr id="51" name="TextBox 50"/>
-          <p:cNvSpPr txBox="1"/>
-          <p:nvPr/>
-        </p:nvSpPr>
-        <p:spPr>
-          <a:xfrm>
-            <a:off x="8392973" y="4721657"/>
+          <p:cNvPr id="53" name="TextBox 52"/>
+          <p:cNvSpPr txBox="1"/>
+          <p:nvPr/>
+        </p:nvSpPr>
+        <p:spPr>
+          <a:xfrm>
+            <a:off x="8392973" y="3350057"/>
             <a:ext cx="2995574" cy="240030"/>
           </a:xfrm>
           <a:prstGeom prst="rect">
@@ -43984,13 +44057,13 @@
       </p:sp>
       <p:sp>
         <p:nvSpPr>
-          <p:cNvPr id="52" name="TextBox 51"/>
-          <p:cNvSpPr txBox="1"/>
-          <p:nvPr/>
-        </p:nvSpPr>
-        <p:spPr>
-          <a:xfrm>
-            <a:off x="9195359" y="4889297"/>
+          <p:cNvPr id="54" name="TextBox 53"/>
+          <p:cNvSpPr txBox="1"/>
+          <p:nvPr/>
+        </p:nvSpPr>
+        <p:spPr>
+          <a:xfrm>
+            <a:off x="9195359" y="3517697"/>
             <a:ext cx="1390802" cy="240030"/>
           </a:xfrm>
           <a:prstGeom prst="rect">
@@ -44019,13 +44092,13 @@
       </p:sp>
       <p:sp>
         <p:nvSpPr>
-          <p:cNvPr id="53" name="TextBox 52"/>
-          <p:cNvSpPr txBox="1"/>
-          <p:nvPr/>
-        </p:nvSpPr>
-        <p:spPr>
-          <a:xfrm>
-            <a:off x="8260080" y="5156454"/>
+          <p:cNvPr id="55" name="TextBox 54"/>
+          <p:cNvSpPr txBox="1"/>
+          <p:nvPr/>
+        </p:nvSpPr>
+        <p:spPr>
+          <a:xfrm>
+            <a:off x="8260080" y="3784854"/>
             <a:ext cx="3374136" cy="200025"/>
           </a:xfrm>
           <a:prstGeom prst="rect">
@@ -44054,13 +44127,13 @@
       </p:sp>
       <p:sp>
         <p:nvSpPr>
-          <p:cNvPr id="54" name="TextBox 53"/>
-          <p:cNvSpPr txBox="1"/>
-          <p:nvPr/>
-        </p:nvSpPr>
-        <p:spPr>
-          <a:xfrm>
-            <a:off x="8260080" y="5316474"/>
+          <p:cNvPr id="56" name="TextBox 55"/>
+          <p:cNvSpPr txBox="1"/>
+          <p:nvPr/>
+        </p:nvSpPr>
+        <p:spPr>
+          <a:xfrm>
+            <a:off x="8260080" y="3944874"/>
             <a:ext cx="3621024" cy="200025"/>
           </a:xfrm>
           <a:prstGeom prst="rect">
@@ -44089,13 +44162,13 @@
       </p:sp>
       <p:sp>
         <p:nvSpPr>
-          <p:cNvPr id="55" name="TextBox 54"/>
-          <p:cNvSpPr txBox="1"/>
-          <p:nvPr/>
-        </p:nvSpPr>
-        <p:spPr>
-          <a:xfrm>
-            <a:off x="8260080" y="5476494"/>
+          <p:cNvPr id="57" name="TextBox 56"/>
+          <p:cNvSpPr txBox="1"/>
+          <p:nvPr/>
+        </p:nvSpPr>
+        <p:spPr>
+          <a:xfrm>
+            <a:off x="8260080" y="4104894"/>
             <a:ext cx="3374136" cy="200025"/>
           </a:xfrm>
           <a:prstGeom prst="rect">
@@ -44124,13 +44197,13 @@
       </p:sp>
       <p:sp>
         <p:nvSpPr>
-          <p:cNvPr id="56" name="TextBox 55"/>
-          <p:cNvSpPr txBox="1"/>
-          <p:nvPr/>
-        </p:nvSpPr>
-        <p:spPr>
-          <a:xfrm>
-            <a:off x="8260080" y="5636514"/>
+          <p:cNvPr id="58" name="TextBox 57"/>
+          <p:cNvSpPr txBox="1"/>
+          <p:nvPr/>
+        </p:nvSpPr>
+        <p:spPr>
+          <a:xfrm>
+            <a:off x="8260080" y="4264914"/>
             <a:ext cx="3044952" cy="200025"/>
           </a:xfrm>
           <a:prstGeom prst="rect">
@@ -44159,13 +44232,13 @@
       </p:sp>
       <p:sp>
         <p:nvSpPr>
-          <p:cNvPr id="57" name="TextBox 56"/>
-          <p:cNvSpPr txBox="1"/>
-          <p:nvPr/>
-        </p:nvSpPr>
-        <p:spPr>
-          <a:xfrm>
-            <a:off x="8260080" y="5796534"/>
+          <p:cNvPr id="59" name="TextBox 58"/>
+          <p:cNvSpPr txBox="1"/>
+          <p:nvPr/>
+        </p:nvSpPr>
+        <p:spPr>
+          <a:xfrm>
+            <a:off x="8260080" y="4424934"/>
             <a:ext cx="2221992" cy="200025"/>
           </a:xfrm>
           <a:prstGeom prst="rect">
@@ -44194,13 +44267,13 @@
       </p:sp>
       <p:sp>
         <p:nvSpPr>
-          <p:cNvPr id="58" name="TextBox 57"/>
-          <p:cNvSpPr txBox="1"/>
-          <p:nvPr/>
-        </p:nvSpPr>
-        <p:spPr>
-          <a:xfrm>
-            <a:off x="8260080" y="5994959"/>
+          <p:cNvPr id="60" name="TextBox 59"/>
+          <p:cNvSpPr txBox="1"/>
+          <p:nvPr/>
+        </p:nvSpPr>
+        <p:spPr>
+          <a:xfrm>
+            <a:off x="8260080" y="4623359"/>
             <a:ext cx="4172407" cy="173355"/>
           </a:xfrm>
           <a:prstGeom prst="rect">
@@ -44229,7 +44302,7 @@
       </p:sp>
       <p:sp>
         <p:nvSpPr>
-          <p:cNvPr id="59" name="Rounded Rectangle 58"/>
+          <p:cNvPr id="61" name="Rounded Rectangle 60"/>
           <p:cNvSpPr/>
           <p:nvPr/>
         </p:nvSpPr>
@@ -44275,7 +44348,7 @@
       </p:sp>
       <p:sp>
         <p:nvSpPr>
-          <p:cNvPr id="60" name="TextBox 59"/>
+          <p:cNvPr id="62" name="TextBox 61"/>
           <p:cNvSpPr txBox="1"/>
           <p:nvPr/>
         </p:nvSpPr>
